--- a/deck/SIH26171_Idea_Submission.pptx
+++ b/deck/SIH26171_Idea_Submission.pptx
@@ -5924,12 +5924,12 @@
               <a:t>Team Name – </a:t>
             </a:r>
             <a:r>
-              <a:rPr sz="1300" b="1">
-                <a:solidFill>
-                  <a:srgbClr val="B46A00"/>
-                </a:solidFill>
-              </a:rPr>
-              <a:t>«Team Name»</a:t>
+              <a:rPr sz="1300" b="0">
+                <a:solidFill>
+                  <a:srgbClr val="141B2E"/>
+                </a:solidFill>
+              </a:rPr>
+              <a:t>Vagabonds</a:t>
             </a:r>
           </a:p>
         </p:txBody>
@@ -6213,7 +6213,7 @@
                   <a:srgbClr val="B46A00"/>
                 </a:solidFill>
               </a:rPr>
-              <a:t>«Team Name»</a:t>
+              <a:t>Vagabonds</a:t>
             </a:r>
           </a:p>
         </p:txBody>
@@ -6798,7 +6798,7 @@
                   <a:srgbClr val="B46A00"/>
                 </a:solidFill>
               </a:rPr>
-              <a:t>«Team Name»</a:t>
+              <a:t>Vagabonds</a:t>
             </a:r>
           </a:p>
         </p:txBody>
@@ -7494,7 +7494,7 @@
                   <a:srgbClr val="B46A00"/>
                 </a:solidFill>
               </a:rPr>
-              <a:t>«Team Name»</a:t>
+              <a:t>Vagabonds</a:t>
             </a:r>
           </a:p>
         </p:txBody>
@@ -8459,7 +8459,7 @@
                   <a:srgbClr val="B46A00"/>
                 </a:solidFill>
               </a:rPr>
-              <a:t>«Team Name»</a:t>
+              <a:t>Vagabonds</a:t>
             </a:r>
           </a:p>
         </p:txBody>
@@ -9319,7 +9319,7 @@
                   <a:srgbClr val="B46A00"/>
                 </a:solidFill>
               </a:rPr>
-              <a:t>«Team Name»</a:t>
+              <a:t>Vagabonds</a:t>
             </a:r>
           </a:p>
         </p:txBody>

--- a/deck/SIH26171_Idea_Submission.pptx
+++ b/deck/SIH26171_Idea_Submission.pptx
@@ -5743,7 +5743,7 @@
                 <a:latin typeface="Times New Roman" panose="02020603050405020304" pitchFamily="18" charset="0"/>
                 <a:cs typeface="Times New Roman" panose="02020603050405020304" pitchFamily="18" charset="0"/>
               </a:rPr>
-              <a:t>TITLE PAGE</a:t>
+              <a:t>AAVARAN</a:t>
             </a:r>
             <a:endParaRPr lang="en-IN" b="1" dirty="0">
               <a:solidFill>
@@ -5870,12 +5870,48 @@
               <a:t>Theme – </a:t>
             </a:r>
             <a:r>
+              <a:rPr sz="1300" b="0">
+                <a:solidFill>
+                  <a:srgbClr val="141B2E"/>
+                </a:solidFill>
+              </a:rPr>
+              <a:t>Smart Automation</a:t>
+            </a:r>
+          </a:p>
+          <a:p>
+            <a:r>
               <a:rPr sz="1300" b="1">
                 <a:solidFill>
+                  <a:srgbClr val="141B2E"/>
+                </a:solidFill>
+              </a:rPr>
+              <a:t>PS Category – </a:t>
+            </a:r>
+            <a:r>
+              <a:rPr sz="1300" b="0">
+                <a:solidFill>
+                  <a:srgbClr val="141B2E"/>
+                </a:solidFill>
+              </a:rPr>
+              <a:t>Software</a:t>
+            </a:r>
+          </a:p>
+          <a:p>
+            <a:r>
+              <a:rPr sz="1300" b="1">
+                <a:solidFill>
+                  <a:srgbClr val="141B2E"/>
+                </a:solidFill>
+              </a:rPr>
+              <a:t>Team ID – </a:t>
+            </a:r>
+            <a:r>
+              <a:rPr sz="1300" b="1">
+                <a:solidFill>
                   <a:srgbClr val="B46A00"/>
                 </a:solidFill>
               </a:rPr>
-              <a:t>«Theme from portal»</a:t>
+              <a:t>«Team ID»</a:t>
             </a:r>
           </a:p>
           <a:p>
@@ -5885,7 +5921,7 @@
                   <a:srgbClr val="141B2E"/>
                 </a:solidFill>
               </a:rPr>
-              <a:t>PS Category – </a:t>
+              <a:t>Team Name – </a:t>
             </a:r>
             <a:r>
               <a:rPr sz="1300" b="0">
@@ -5893,7 +5929,7 @@
                   <a:srgbClr val="141B2E"/>
                 </a:solidFill>
               </a:rPr>
-              <a:t>Software</a:t>
+              <a:t>Vagabonds</a:t>
             </a:r>
           </a:p>
           <a:p>
@@ -5903,33 +5939,15 @@
                   <a:srgbClr val="141B2E"/>
                 </a:solidFill>
               </a:rPr>
-              <a:t>Team ID – </a:t>
-            </a:r>
-            <a:r>
-              <a:rPr sz="1300" b="1">
-                <a:solidFill>
-                  <a:srgbClr val="B46A00"/>
-                </a:solidFill>
-              </a:rPr>
-              <a:t>«Team ID»</a:t>
-            </a:r>
-          </a:p>
-          <a:p>
-            <a:r>
-              <a:rPr sz="1300" b="1">
+              <a:t>Solution – </a:t>
+            </a:r>
+            <a:r>
+              <a:rPr sz="1300" b="0">
                 <a:solidFill>
                   <a:srgbClr val="141B2E"/>
                 </a:solidFill>
               </a:rPr>
-              <a:t>Team Name – </a:t>
-            </a:r>
-            <a:r>
-              <a:rPr sz="1300" b="0">
-                <a:solidFill>
-                  <a:srgbClr val="141B2E"/>
-                </a:solidFill>
-              </a:rPr>
-              <a:t>Vagabonds</a:t>
+              <a:t>Aavaran</a:t>
             </a:r>
           </a:p>
         </p:txBody>
@@ -6089,7 +6107,7 @@
                 <a:ea typeface="ＭＳ Ｐゴシック" pitchFamily="1" charset="-128"/>
                 <a:cs typeface="Times New Roman" panose="02020603050405020304" pitchFamily="18" charset="0"/>
               </a:rPr>
-              <a:t>IDEA TITLE</a:t>
+              <a:t>REDACT BEFORE YOU SEND</a:t>
             </a:r>
           </a:p>
         </p:txBody>
@@ -6281,7 +6299,7 @@
                   <a:srgbClr val="2B3A8F"/>
                 </a:solidFill>
               </a:rPr>
-              <a:t>An AI agent that reads your screen — without your personal data ever leaving the machine.</a:t>
+              <a:t>Aavaran — an AI agent that reads your screen, without your personal data ever leaving the machine.</a:t>
             </a:r>
           </a:p>
           <a:p>
